--- a/prezentacio/Magyar Földeken.pptx
+++ b/prezentacio/Magyar Földeken.pptx
@@ -11,7 +11,8 @@
     <p:sldId id="259" r:id="rId5"/>
     <p:sldId id="260" r:id="rId6"/>
     <p:sldId id="261" r:id="rId7"/>
-    <p:sldId id="262" r:id="rId8"/>
+    <p:sldId id="263" r:id="rId8"/>
+    <p:sldId id="262" r:id="rId9"/>
   </p:sldIdLst>
   <p:sldSz cx="12192000" cy="6858000"/>
   <p:notesSz cx="6858000" cy="9144000"/>
@@ -118,6 +119,14 @@
 </p:presentation>
 </file>
 
+<file path=ppt/revisionInfo.xml><?xml version="1.0" encoding="utf-8"?>
+<p1510:revInfo xmlns:a="http://schemas.openxmlformats.org/drawingml/2006/main" xmlns:r="http://schemas.openxmlformats.org/officeDocument/2006/relationships" xmlns:p1510="http://schemas.microsoft.com/office/powerpoint/2015/10/main">
+  <p1510:revLst>
+    <p1510:client id="{EDAB2F63-D970-1D29-A3E8-5344BF7CC03D}" v="23" dt="2025-01-08T20:44:42.774"/>
+  </p1510:revLst>
+</p1510:revInfo>
+</file>
+
 <file path=ppt/slideLayouts/slideLayout1.xml><?xml version="1.0" encoding="utf-8"?>
 <p:sldLayout xmlns:a="http://schemas.openxmlformats.org/drawingml/2006/main" xmlns:r="http://schemas.openxmlformats.org/officeDocument/2006/relationships" xmlns:p="http://schemas.openxmlformats.org/presentationml/2006/main" type="title" preserve="1">
   <p:cSld name="Címdia">
@@ -265,7 +274,7 @@
           <a:p>
             <a:fld id="{63B06D56-3F6A-4050-8535-D106BA41135A}" type="datetimeFigureOut">
               <a:rPr lang="hu-HU" smtClean="0"/>
-              <a:t>2024. 12. 19.</a:t>
+              <a:t>2025. 01. 08.</a:t>
             </a:fld>
             <a:endParaRPr lang="hu-HU"/>
           </a:p>
@@ -463,7 +472,7 @@
           <a:p>
             <a:fld id="{63B06D56-3F6A-4050-8535-D106BA41135A}" type="datetimeFigureOut">
               <a:rPr lang="hu-HU" smtClean="0"/>
-              <a:t>2024. 12. 19.</a:t>
+              <a:t>2025. 01. 08.</a:t>
             </a:fld>
             <a:endParaRPr lang="hu-HU"/>
           </a:p>
@@ -671,7 +680,7 @@
           <a:p>
             <a:fld id="{63B06D56-3F6A-4050-8535-D106BA41135A}" type="datetimeFigureOut">
               <a:rPr lang="hu-HU" smtClean="0"/>
-              <a:t>2024. 12. 19.</a:t>
+              <a:t>2025. 01. 08.</a:t>
             </a:fld>
             <a:endParaRPr lang="hu-HU"/>
           </a:p>
@@ -869,7 +878,7 @@
           <a:p>
             <a:fld id="{63B06D56-3F6A-4050-8535-D106BA41135A}" type="datetimeFigureOut">
               <a:rPr lang="hu-HU" smtClean="0"/>
-              <a:t>2024. 12. 19.</a:t>
+              <a:t>2025. 01. 08.</a:t>
             </a:fld>
             <a:endParaRPr lang="hu-HU"/>
           </a:p>
@@ -1144,7 +1153,7 @@
           <a:p>
             <a:fld id="{63B06D56-3F6A-4050-8535-D106BA41135A}" type="datetimeFigureOut">
               <a:rPr lang="hu-HU" smtClean="0"/>
-              <a:t>2024. 12. 19.</a:t>
+              <a:t>2025. 01. 08.</a:t>
             </a:fld>
             <a:endParaRPr lang="hu-HU"/>
           </a:p>
@@ -1409,7 +1418,7 @@
           <a:p>
             <a:fld id="{63B06D56-3F6A-4050-8535-D106BA41135A}" type="datetimeFigureOut">
               <a:rPr lang="hu-HU" smtClean="0"/>
-              <a:t>2024. 12. 19.</a:t>
+              <a:t>2025. 01. 08.</a:t>
             </a:fld>
             <a:endParaRPr lang="hu-HU"/>
           </a:p>
@@ -1821,7 +1830,7 @@
           <a:p>
             <a:fld id="{63B06D56-3F6A-4050-8535-D106BA41135A}" type="datetimeFigureOut">
               <a:rPr lang="hu-HU" smtClean="0"/>
-              <a:t>2024. 12. 19.</a:t>
+              <a:t>2025. 01. 08.</a:t>
             </a:fld>
             <a:endParaRPr lang="hu-HU"/>
           </a:p>
@@ -1962,7 +1971,7 @@
           <a:p>
             <a:fld id="{63B06D56-3F6A-4050-8535-D106BA41135A}" type="datetimeFigureOut">
               <a:rPr lang="hu-HU" smtClean="0"/>
-              <a:t>2024. 12. 19.</a:t>
+              <a:t>2025. 01. 08.</a:t>
             </a:fld>
             <a:endParaRPr lang="hu-HU"/>
           </a:p>
@@ -2075,7 +2084,7 @@
           <a:p>
             <a:fld id="{63B06D56-3F6A-4050-8535-D106BA41135A}" type="datetimeFigureOut">
               <a:rPr lang="hu-HU" smtClean="0"/>
-              <a:t>2024. 12. 19.</a:t>
+              <a:t>2025. 01. 08.</a:t>
             </a:fld>
             <a:endParaRPr lang="hu-HU"/>
           </a:p>
@@ -2386,7 +2395,7 @@
           <a:p>
             <a:fld id="{63B06D56-3F6A-4050-8535-D106BA41135A}" type="datetimeFigureOut">
               <a:rPr lang="hu-HU" smtClean="0"/>
-              <a:t>2024. 12. 19.</a:t>
+              <a:t>2025. 01. 08.</a:t>
             </a:fld>
             <a:endParaRPr lang="hu-HU"/>
           </a:p>
@@ -2674,7 +2683,7 @@
           <a:p>
             <a:fld id="{63B06D56-3F6A-4050-8535-D106BA41135A}" type="datetimeFigureOut">
               <a:rPr lang="hu-HU" smtClean="0"/>
-              <a:t>2024. 12. 19.</a:t>
+              <a:t>2025. 01. 08.</a:t>
             </a:fld>
             <a:endParaRPr lang="hu-HU"/>
           </a:p>
@@ -2751,9 +2760,28 @@
 <p:sldMaster xmlns:a="http://schemas.openxmlformats.org/drawingml/2006/main" xmlns:r="http://schemas.openxmlformats.org/officeDocument/2006/relationships" xmlns:p="http://schemas.openxmlformats.org/presentationml/2006/main">
   <p:cSld>
     <p:bg>
-      <p:bgRef idx="1001">
-        <a:schemeClr val="bg1"/>
-      </p:bgRef>
+      <p:bgPr>
+        <a:gradFill flip="none" rotWithShape="1">
+          <a:gsLst>
+            <a:gs pos="0">
+              <a:schemeClr val="accent3">
+                <a:lumMod val="0"/>
+                <a:lumOff val="100000"/>
+              </a:schemeClr>
+            </a:gs>
+            <a:gs pos="89000">
+              <a:schemeClr val="accent3">
+                <a:lumMod val="100000"/>
+              </a:schemeClr>
+            </a:gs>
+          </a:gsLst>
+          <a:path path="circle">
+            <a:fillToRect l="50000" t="-80000" r="50000" b="180000"/>
+          </a:path>
+          <a:tileRect/>
+        </a:gradFill>
+        <a:effectLst/>
+      </p:bgPr>
     </p:bg>
     <p:spTree>
       <p:nvGrpSpPr>
@@ -2915,7 +2943,7 @@
           <a:p>
             <a:fld id="{63B06D56-3F6A-4050-8535-D106BA41135A}" type="datetimeFigureOut">
               <a:rPr lang="hu-HU" smtClean="0"/>
-              <a:t>2024. 12. 19.</a:t>
+              <a:t>2025. 01. 08.</a:t>
             </a:fld>
             <a:endParaRPr lang="hu-HU"/>
           </a:p>
@@ -3476,30 +3504,6 @@
 <file path=ppt/slides/slide2.xml><?xml version="1.0" encoding="utf-8"?>
 <p:sld xmlns:a="http://schemas.openxmlformats.org/drawingml/2006/main" xmlns:r="http://schemas.openxmlformats.org/officeDocument/2006/relationships" xmlns:p="http://schemas.openxmlformats.org/presentationml/2006/main">
   <p:cSld>
-    <p:bg>
-      <p:bgPr>
-        <a:gradFill flip="none" rotWithShape="1">
-          <a:gsLst>
-            <a:gs pos="0">
-              <a:schemeClr val="accent3">
-                <a:lumMod val="0"/>
-                <a:lumOff val="100000"/>
-              </a:schemeClr>
-            </a:gs>
-            <a:gs pos="89000">
-              <a:schemeClr val="accent3">
-                <a:lumMod val="100000"/>
-              </a:schemeClr>
-            </a:gs>
-          </a:gsLst>
-          <a:path path="circle">
-            <a:fillToRect l="50000" t="-80000" r="50000" b="180000"/>
-          </a:path>
-          <a:tileRect/>
-        </a:gradFill>
-        <a:effectLst/>
-      </p:bgPr>
-    </p:bg>
     <p:spTree>
       <p:nvGrpSpPr>
         <p:cNvPr id="1" name=""/>
@@ -3621,8 +3625,8 @@
         </p:blipFill>
         <p:spPr>
           <a:xfrm>
-            <a:off x="8068887" y="3765665"/>
-            <a:ext cx="4123113" cy="3092335"/>
+            <a:off x="8189692" y="1693397"/>
+            <a:ext cx="3667772" cy="3473334"/>
           </a:xfrm>
           <a:prstGeom prst="rect">
             <a:avLst/>
@@ -3645,30 +3649,6 @@
 <file path=ppt/slides/slide3.xml><?xml version="1.0" encoding="utf-8"?>
 <p:sld xmlns:a="http://schemas.openxmlformats.org/drawingml/2006/main" xmlns:r="http://schemas.openxmlformats.org/officeDocument/2006/relationships" xmlns:p="http://schemas.openxmlformats.org/presentationml/2006/main">
   <p:cSld>
-    <p:bg>
-      <p:bgPr>
-        <a:gradFill flip="none" rotWithShape="1">
-          <a:gsLst>
-            <a:gs pos="0">
-              <a:schemeClr val="accent3">
-                <a:lumMod val="0"/>
-                <a:lumOff val="100000"/>
-              </a:schemeClr>
-            </a:gs>
-            <a:gs pos="89000">
-              <a:schemeClr val="accent3">
-                <a:lumMod val="100000"/>
-              </a:schemeClr>
-            </a:gs>
-          </a:gsLst>
-          <a:path path="circle">
-            <a:fillToRect l="50000" t="-80000" r="50000" b="180000"/>
-          </a:path>
-          <a:tileRect/>
-        </a:gradFill>
-        <a:effectLst/>
-      </p:bgPr>
-    </p:bg>
     <p:spTree>
       <p:nvGrpSpPr>
         <p:cNvPr id="1" name=""/>
@@ -3814,30 +3794,6 @@
 <file path=ppt/slides/slide4.xml><?xml version="1.0" encoding="utf-8"?>
 <p:sld xmlns:a="http://schemas.openxmlformats.org/drawingml/2006/main" xmlns:r="http://schemas.openxmlformats.org/officeDocument/2006/relationships" xmlns:p="http://schemas.openxmlformats.org/presentationml/2006/main">
   <p:cSld>
-    <p:bg>
-      <p:bgPr>
-        <a:gradFill flip="none" rotWithShape="1">
-          <a:gsLst>
-            <a:gs pos="0">
-              <a:schemeClr val="accent3">
-                <a:lumMod val="0"/>
-                <a:lumOff val="100000"/>
-              </a:schemeClr>
-            </a:gs>
-            <a:gs pos="89000">
-              <a:schemeClr val="accent3">
-                <a:lumMod val="100000"/>
-              </a:schemeClr>
-            </a:gs>
-          </a:gsLst>
-          <a:path path="circle">
-            <a:fillToRect l="50000" t="-80000" r="50000" b="180000"/>
-          </a:path>
-          <a:tileRect/>
-        </a:gradFill>
-        <a:effectLst/>
-      </p:bgPr>
-    </p:bg>
     <p:spTree>
       <p:nvGrpSpPr>
         <p:cNvPr id="1" name=""/>
@@ -3980,30 +3936,6 @@
 <file path=ppt/slides/slide5.xml><?xml version="1.0" encoding="utf-8"?>
 <p:sld xmlns:a="http://schemas.openxmlformats.org/drawingml/2006/main" xmlns:r="http://schemas.openxmlformats.org/officeDocument/2006/relationships" xmlns:p="http://schemas.openxmlformats.org/presentationml/2006/main">
   <p:cSld>
-    <p:bg>
-      <p:bgPr>
-        <a:gradFill flip="none" rotWithShape="1">
-          <a:gsLst>
-            <a:gs pos="0">
-              <a:schemeClr val="accent3">
-                <a:lumMod val="0"/>
-                <a:lumOff val="100000"/>
-              </a:schemeClr>
-            </a:gs>
-            <a:gs pos="89000">
-              <a:schemeClr val="accent3">
-                <a:lumMod val="100000"/>
-              </a:schemeClr>
-            </a:gs>
-          </a:gsLst>
-          <a:path path="circle">
-            <a:fillToRect l="50000" t="-80000" r="50000" b="180000"/>
-          </a:path>
-          <a:tileRect/>
-        </a:gradFill>
-        <a:effectLst/>
-      </p:bgPr>
-    </p:bg>
     <p:spTree>
       <p:nvGrpSpPr>
         <p:cNvPr id="1" name=""/>
@@ -4163,30 +4095,6 @@
 <file path=ppt/slides/slide6.xml><?xml version="1.0" encoding="utf-8"?>
 <p:sld xmlns:a="http://schemas.openxmlformats.org/drawingml/2006/main" xmlns:r="http://schemas.openxmlformats.org/officeDocument/2006/relationships" xmlns:p="http://schemas.openxmlformats.org/presentationml/2006/main">
   <p:cSld>
-    <p:bg>
-      <p:bgPr>
-        <a:gradFill flip="none" rotWithShape="1">
-          <a:gsLst>
-            <a:gs pos="0">
-              <a:schemeClr val="accent3">
-                <a:lumMod val="0"/>
-                <a:lumOff val="100000"/>
-              </a:schemeClr>
-            </a:gs>
-            <a:gs pos="89000">
-              <a:schemeClr val="accent3">
-                <a:lumMod val="100000"/>
-              </a:schemeClr>
-            </a:gs>
-          </a:gsLst>
-          <a:path path="circle">
-            <a:fillToRect l="50000" t="-80000" r="50000" b="180000"/>
-          </a:path>
-          <a:tileRect/>
-        </a:gradFill>
-        <a:effectLst/>
-      </p:bgPr>
-    </p:bg>
     <p:spTree>
       <p:nvGrpSpPr>
         <p:cNvPr id="1" name=""/>
@@ -4256,7 +4164,7 @@
           <a:lstStyle/>
           <a:p>
             <a:r>
-              <a:rPr lang="hu-HU" dirty="0" err="1" smtClean="0"/>
+              <a:rPr lang="hu-HU" dirty="0" err="1"/>
               <a:t>SQlite</a:t>
             </a:r>
             <a:endParaRPr lang="hu-HU" dirty="0"/>
@@ -4319,6 +4227,97 @@
 </file>
 
 <file path=ppt/slides/slide7.xml><?xml version="1.0" encoding="utf-8"?>
+<p:sld xmlns:a="http://schemas.openxmlformats.org/drawingml/2006/main" xmlns:r="http://schemas.openxmlformats.org/officeDocument/2006/relationships" xmlns:p="http://schemas.openxmlformats.org/presentationml/2006/main">
+  <p:cSld>
+    <p:spTree>
+      <p:nvGrpSpPr>
+        <p:cNvPr id="1" name=""/>
+        <p:cNvGrpSpPr/>
+        <p:nvPr/>
+      </p:nvGrpSpPr>
+      <p:grpSpPr>
+        <a:xfrm>
+          <a:off x="0" y="0"/>
+          <a:ext cx="0" cy="0"/>
+          <a:chOff x="0" y="0"/>
+          <a:chExt cx="0" cy="0"/>
+        </a:xfrm>
+      </p:grpSpPr>
+      <p:sp>
+        <p:nvSpPr>
+          <p:cNvPr id="2" name="Cím 1">
+            <a:extLst>
+              <a:ext uri="{FF2B5EF4-FFF2-40B4-BE49-F238E27FC236}">
+                <a16:creationId xmlns:a16="http://schemas.microsoft.com/office/drawing/2014/main" id="{463658C1-0B5B-327F-E65A-86A65DB7C55C}"/>
+              </a:ext>
+            </a:extLst>
+          </p:cNvPr>
+          <p:cNvSpPr>
+            <a:spLocks noGrp="1"/>
+          </p:cNvSpPr>
+          <p:nvPr>
+            <p:ph type="title"/>
+          </p:nvPr>
+        </p:nvSpPr>
+        <p:spPr/>
+        <p:txBody>
+          <a:bodyPr/>
+          <a:lstStyle/>
+          <a:p>
+            <a:r>
+              <a:rPr lang="hu-HU" dirty="0">
+                <a:ea typeface="Calibri Light"/>
+                <a:cs typeface="Calibri Light"/>
+              </a:rPr>
+              <a:t>Az év képe</a:t>
+            </a:r>
+            <a:endParaRPr lang="hu-HU" dirty="0"/>
+          </a:p>
+        </p:txBody>
+      </p:sp>
+      <p:pic>
+        <p:nvPicPr>
+          <p:cNvPr id="4" name="Tartalom helye 3" descr="A képen szöveg, képernyőkép, szoftver, Multimédiás szoftver látható&#10;&#10;Automatikusan generált leírás">
+            <a:extLst>
+              <a:ext uri="{FF2B5EF4-FFF2-40B4-BE49-F238E27FC236}">
+                <a16:creationId xmlns:a16="http://schemas.microsoft.com/office/drawing/2014/main" id="{10E6404C-9047-0A97-E180-A00A2E1FD742}"/>
+              </a:ext>
+            </a:extLst>
+          </p:cNvPr>
+          <p:cNvPicPr>
+            <a:picLocks noGrp="1" noChangeAspect="1"/>
+          </p:cNvPicPr>
+          <p:nvPr>
+            <p:ph idx="1"/>
+          </p:nvPr>
+        </p:nvPicPr>
+        <p:blipFill>
+          <a:blip r:embed="rId2"/>
+          <a:stretch>
+            <a:fillRect/>
+          </a:stretch>
+        </p:blipFill>
+        <p:spPr>
+          <a:xfrm>
+            <a:off x="1825019" y="1416748"/>
+            <a:ext cx="9610622" cy="4881020"/>
+          </a:xfrm>
+        </p:spPr>
+      </p:pic>
+    </p:spTree>
+    <p:extLst>
+      <p:ext uri="{BB962C8B-B14F-4D97-AF65-F5344CB8AC3E}">
+        <p14:creationId xmlns:p14="http://schemas.microsoft.com/office/powerpoint/2010/main" val="3042811510"/>
+      </p:ext>
+    </p:extLst>
+  </p:cSld>
+  <p:clrMapOvr>
+    <a:masterClrMapping/>
+  </p:clrMapOvr>
+</p:sld>
+</file>
+
+<file path=ppt/slides/slide8.xml><?xml version="1.0" encoding="utf-8"?>
 <p:sld xmlns:a="http://schemas.openxmlformats.org/drawingml/2006/main" xmlns:r="http://schemas.openxmlformats.org/officeDocument/2006/relationships" xmlns:p="http://schemas.openxmlformats.org/presentationml/2006/main">
   <p:cSld>
     <p:spTree>
